--- a/design/apresentacoes/Cartilha-Halux-Valgo-Apresentacao.pptx
+++ b/design/apresentacoes/Cartilha-Halux-Valgo-Apresentacao.pptx
@@ -14029,8 +14029,8 @@
         </p:nvSpPr>
         <p:spPr>
           <a:xfrm>
-            <a:off x="566928" y="1920240"/>
-            <a:ext cx="5989320" cy="4123944"/>
+            <a:off x="566928" y="2181987"/>
+            <a:ext cx="5989320" cy="3600450"/>
           </a:xfrm>
           <a:prstGeom prst="roundRect">
             <a:avLst>
@@ -14069,7 +14069,7 @@
       </p:sp>
       <p:pic>
         <p:nvPicPr>
-          <p:cNvPr id="9" name="Picture 8" descr="01_ball_release-static_webp.jpg"/>
+          <p:cNvPr id="9" name="Picture 8" descr="01_ball_release_jpg.jpg"/>
           <p:cNvPicPr>
             <a:picLocks noChangeAspect="1"/>
           </p:cNvPicPr>
@@ -14083,8 +14083,8 @@
         </p:blipFill>
         <p:spPr>
           <a:xfrm>
-            <a:off x="676656" y="2074951"/>
-            <a:ext cx="5769864" cy="3814521"/>
+            <a:off x="694944" y="2310003"/>
+            <a:ext cx="5733288" cy="3344418"/>
           </a:xfrm>
           <a:prstGeom prst="rect">
             <a:avLst/>
@@ -14927,8 +14927,8 @@
         </p:nvSpPr>
         <p:spPr>
           <a:xfrm>
-            <a:off x="566928" y="1920240"/>
-            <a:ext cx="5989320" cy="4123944"/>
+            <a:off x="862048" y="1920240"/>
+            <a:ext cx="5399079" cy="4123944"/>
           </a:xfrm>
           <a:prstGeom prst="roundRect">
             <a:avLst>
@@ -14967,7 +14967,7 @@
       </p:sp>
       <p:pic>
         <p:nvPicPr>
-          <p:cNvPr id="9" name="Picture 8" descr="02_passive_movements-static_webp.jpg"/>
+          <p:cNvPr id="9" name="Picture 8" descr="02_passive_movements_jpg.jpg"/>
           <p:cNvPicPr>
             <a:picLocks noChangeAspect="1"/>
           </p:cNvPicPr>
@@ -14981,8 +14981,8 @@
         </p:blipFill>
         <p:spPr>
           <a:xfrm>
-            <a:off x="676656" y="2074951"/>
-            <a:ext cx="5769864" cy="3814521"/>
+            <a:off x="990064" y="2048256"/>
+            <a:ext cx="5143047" cy="3867911"/>
           </a:xfrm>
           <a:prstGeom prst="rect">
             <a:avLst/>
@@ -15548,8 +15548,8 @@
         </p:nvSpPr>
         <p:spPr>
           <a:xfrm>
-            <a:off x="566928" y="1920240"/>
-            <a:ext cx="5989320" cy="4123944"/>
+            <a:off x="566928" y="1996934"/>
+            <a:ext cx="5989320" cy="3970556"/>
           </a:xfrm>
           <a:prstGeom prst="roundRect">
             <a:avLst>
@@ -15588,7 +15588,7 @@
       </p:sp>
       <p:pic>
         <p:nvPicPr>
-          <p:cNvPr id="9" name="Picture 8" descr="03_joint_traction-static_webp.jpg"/>
+          <p:cNvPr id="9" name="Picture 8" descr="03_joint_traction_jpg.jpg"/>
           <p:cNvPicPr>
             <a:picLocks noChangeAspect="1"/>
           </p:cNvPicPr>
@@ -15602,8 +15602,8 @@
         </p:blipFill>
         <p:spPr>
           <a:xfrm>
-            <a:off x="676656" y="2074951"/>
-            <a:ext cx="5769864" cy="3814521"/>
+            <a:off x="694944" y="2124950"/>
+            <a:ext cx="5733287" cy="3714524"/>
           </a:xfrm>
           <a:prstGeom prst="rect">
             <a:avLst/>
@@ -16169,8 +16169,8 @@
         </p:nvSpPr>
         <p:spPr>
           <a:xfrm>
-            <a:off x="566928" y="1920240"/>
-            <a:ext cx="5989320" cy="4123944"/>
+            <a:off x="566928" y="2020505"/>
+            <a:ext cx="5989320" cy="3923414"/>
           </a:xfrm>
           <a:prstGeom prst="roundRect">
             <a:avLst>
@@ -16209,7 +16209,7 @@
       </p:sp>
       <p:pic>
         <p:nvPicPr>
-          <p:cNvPr id="9" name="Picture 8" descr="04_joint_mobilization-static_webp.jpg"/>
+          <p:cNvPr id="9" name="Picture 8" descr="04_joint_mobilization_jpg.jpg"/>
           <p:cNvPicPr>
             <a:picLocks noChangeAspect="1"/>
           </p:cNvPicPr>
@@ -16223,8 +16223,8 @@
         </p:blipFill>
         <p:spPr>
           <a:xfrm>
-            <a:off x="676656" y="2074951"/>
-            <a:ext cx="5769864" cy="3814521"/>
+            <a:off x="694944" y="2148521"/>
+            <a:ext cx="5733287" cy="3667382"/>
           </a:xfrm>
           <a:prstGeom prst="rect">
             <a:avLst/>
@@ -16790,8 +16790,8 @@
         </p:nvSpPr>
         <p:spPr>
           <a:xfrm>
-            <a:off x="566928" y="1920240"/>
-            <a:ext cx="5989320" cy="4123944"/>
+            <a:off x="566928" y="1977847"/>
+            <a:ext cx="5989320" cy="4008729"/>
           </a:xfrm>
           <a:prstGeom prst="roundRect">
             <a:avLst>
@@ -16830,7 +16830,7 @@
       </p:sp>
       <p:pic>
         <p:nvPicPr>
-          <p:cNvPr id="9" name="Picture 8" descr="05_extensor_release-static_webp.jpg"/>
+          <p:cNvPr id="9" name="Picture 8" descr="05_extensor_release_jpg.jpg"/>
           <p:cNvPicPr>
             <a:picLocks noChangeAspect="1"/>
           </p:cNvPicPr>
@@ -16844,8 +16844,8 @@
         </p:blipFill>
         <p:spPr>
           <a:xfrm>
-            <a:off x="676656" y="2074951"/>
-            <a:ext cx="5769864" cy="3814521"/>
+            <a:off x="694944" y="2105863"/>
+            <a:ext cx="5733287" cy="3752697"/>
           </a:xfrm>
           <a:prstGeom prst="rect">
             <a:avLst/>
@@ -17411,8 +17411,8 @@
         </p:nvSpPr>
         <p:spPr>
           <a:xfrm>
-            <a:off x="566928" y="1920240"/>
-            <a:ext cx="5989320" cy="4123944"/>
+            <a:off x="566928" y="1961889"/>
+            <a:ext cx="5989320" cy="4040646"/>
           </a:xfrm>
           <a:prstGeom prst="roundRect">
             <a:avLst>
@@ -17451,7 +17451,7 @@
       </p:sp>
       <p:pic>
         <p:nvPicPr>
-          <p:cNvPr id="9" name="Picture 8" descr="06_capsule_massage-static_webp.jpg"/>
+          <p:cNvPr id="9" name="Picture 8" descr="06_joint_line_capsule_massage_jpg.jpg"/>
           <p:cNvPicPr>
             <a:picLocks noChangeAspect="1"/>
           </p:cNvPicPr>
@@ -17465,8 +17465,8 @@
         </p:blipFill>
         <p:spPr>
           <a:xfrm>
-            <a:off x="676656" y="2074951"/>
-            <a:ext cx="5769864" cy="3814521"/>
+            <a:off x="694944" y="2089905"/>
+            <a:ext cx="5733287" cy="3784614"/>
           </a:xfrm>
           <a:prstGeom prst="rect">
             <a:avLst/>
@@ -18555,8 +18555,8 @@
         </p:nvSpPr>
         <p:spPr>
           <a:xfrm>
-            <a:off x="566928" y="1920240"/>
-            <a:ext cx="5989320" cy="4123944"/>
+            <a:off x="963245" y="1920240"/>
+            <a:ext cx="5196685" cy="4123944"/>
           </a:xfrm>
           <a:prstGeom prst="roundRect">
             <a:avLst>
@@ -18595,7 +18595,7 @@
       </p:sp>
       <p:pic>
         <p:nvPicPr>
-          <p:cNvPr id="9" name="Picture 8" descr="07_flexion_stretch-static_webp.jpg"/>
+          <p:cNvPr id="9" name="Picture 8" descr="07_big_toe_flexion_stretch_jpg.jpg"/>
           <p:cNvPicPr>
             <a:picLocks noChangeAspect="1"/>
           </p:cNvPicPr>
@@ -18609,8 +18609,8 @@
         </p:blipFill>
         <p:spPr>
           <a:xfrm>
-            <a:off x="676656" y="2074951"/>
-            <a:ext cx="5769864" cy="3814521"/>
+            <a:off x="1091261" y="2048256"/>
+            <a:ext cx="4940653" cy="3867911"/>
           </a:xfrm>
           <a:prstGeom prst="rect">
             <a:avLst/>
@@ -19176,8 +19176,8 @@
         </p:nvSpPr>
         <p:spPr>
           <a:xfrm>
-            <a:off x="566928" y="1920240"/>
-            <a:ext cx="5989320" cy="4123944"/>
+            <a:off x="1342809" y="1920240"/>
+            <a:ext cx="4437558" cy="4123944"/>
           </a:xfrm>
           <a:prstGeom prst="roundRect">
             <a:avLst>
@@ -19216,7 +19216,7 @@
       </p:sp>
       <p:pic>
         <p:nvPicPr>
-          <p:cNvPr id="9" name="Picture 8" descr="08_extension_stretch-static_webp.jpg"/>
+          <p:cNvPr id="9" name="Picture 8" descr="08_big_toe_extension_stretch_jpg.jpg"/>
           <p:cNvPicPr>
             <a:picLocks noChangeAspect="1"/>
           </p:cNvPicPr>
@@ -19230,8 +19230,8 @@
         </p:blipFill>
         <p:spPr>
           <a:xfrm>
-            <a:off x="676656" y="2074951"/>
-            <a:ext cx="5769864" cy="3814521"/>
+            <a:off x="1470825" y="2048256"/>
+            <a:ext cx="4181526" cy="3867911"/>
           </a:xfrm>
           <a:prstGeom prst="rect">
             <a:avLst/>
@@ -19797,8 +19797,8 @@
         </p:nvSpPr>
         <p:spPr>
           <a:xfrm>
-            <a:off x="566928" y="1920240"/>
-            <a:ext cx="5989320" cy="4123944"/>
+            <a:off x="1001085" y="1920240"/>
+            <a:ext cx="5121005" cy="4123944"/>
           </a:xfrm>
           <a:prstGeom prst="roundRect">
             <a:avLst>
@@ -19837,7 +19837,7 @@
       </p:sp>
       <p:pic>
         <p:nvPicPr>
-          <p:cNvPr id="9" name="Picture 8" descr="09_extension_wall-static_webp.jpg"/>
+          <p:cNvPr id="9" name="Picture 8" descr="09_big_toe_extension_against_wall_jpg.jpg"/>
           <p:cNvPicPr>
             <a:picLocks noChangeAspect="1"/>
           </p:cNvPicPr>
@@ -19851,8 +19851,8 @@
         </p:blipFill>
         <p:spPr>
           <a:xfrm>
-            <a:off x="676656" y="2074951"/>
-            <a:ext cx="5769864" cy="3814521"/>
+            <a:off x="1129101" y="2048256"/>
+            <a:ext cx="4864973" cy="3867911"/>
           </a:xfrm>
           <a:prstGeom prst="rect">
             <a:avLst/>
@@ -20418,8 +20418,8 @@
         </p:nvSpPr>
         <p:spPr>
           <a:xfrm>
-            <a:off x="566928" y="1920240"/>
-            <a:ext cx="5989320" cy="4123944"/>
+            <a:off x="860798" y="1920240"/>
+            <a:ext cx="5401580" cy="4123944"/>
           </a:xfrm>
           <a:prstGeom prst="roundRect">
             <a:avLst>
@@ -20458,7 +20458,7 @@
       </p:sp>
       <p:pic>
         <p:nvPicPr>
-          <p:cNvPr id="9" name="Picture 8" descr="10_advanced_extension-static_webp.jpg"/>
+          <p:cNvPr id="9" name="Picture 8" descr="10_advanced_extension_stretch_jpg.jpg"/>
           <p:cNvPicPr>
             <a:picLocks noChangeAspect="1"/>
           </p:cNvPicPr>
@@ -20472,8 +20472,8 @@
         </p:blipFill>
         <p:spPr>
           <a:xfrm>
-            <a:off x="676656" y="2074951"/>
-            <a:ext cx="5769864" cy="3814521"/>
+            <a:off x="988814" y="2048256"/>
+            <a:ext cx="5145548" cy="3867911"/>
           </a:xfrm>
           <a:prstGeom prst="rect">
             <a:avLst/>
@@ -21558,8 +21558,8 @@
         </p:nvSpPr>
         <p:spPr>
           <a:xfrm>
-            <a:off x="566928" y="1920240"/>
-            <a:ext cx="5989320" cy="4123944"/>
+            <a:off x="989052" y="1920240"/>
+            <a:ext cx="5145072" cy="4123944"/>
           </a:xfrm>
           <a:prstGeom prst="roundRect">
             <a:avLst>
@@ -21598,7 +21598,7 @@
       </p:sp>
       <p:pic>
         <p:nvPicPr>
-          <p:cNvPr id="9" name="Picture 8" descr="11_abduction_stretch-static_webp.jpg"/>
+          <p:cNvPr id="9" name="Picture 8" descr="11_big_toe_abduction_stretch_jpg.jpg"/>
           <p:cNvPicPr>
             <a:picLocks noChangeAspect="1"/>
           </p:cNvPicPr>
@@ -21612,8 +21612,8 @@
         </p:blipFill>
         <p:spPr>
           <a:xfrm>
-            <a:off x="676656" y="2074951"/>
-            <a:ext cx="5769864" cy="3814521"/>
+            <a:off x="1117068" y="2048256"/>
+            <a:ext cx="4889040" cy="3867911"/>
           </a:xfrm>
           <a:prstGeom prst="rect">
             <a:avLst/>
@@ -22674,8 +22674,8 @@
         </p:nvSpPr>
         <p:spPr>
           <a:xfrm>
-            <a:off x="566928" y="1920240"/>
-            <a:ext cx="5989320" cy="4123944"/>
+            <a:off x="2125514" y="1920240"/>
+            <a:ext cx="2872147" cy="4123944"/>
           </a:xfrm>
           <a:prstGeom prst="roundRect">
             <a:avLst>
@@ -22714,7 +22714,7 @@
       </p:sp>
       <p:pic>
         <p:nvPicPr>
-          <p:cNvPr id="9" name="Picture 8" descr="12_big_toe_lift-static_webp.jpg"/>
+          <p:cNvPr id="9" name="Picture 8" descr="12_big_toe_lift_jpg.jpg"/>
           <p:cNvPicPr>
             <a:picLocks noChangeAspect="1"/>
           </p:cNvPicPr>
@@ -22728,8 +22728,8 @@
         </p:blipFill>
         <p:spPr>
           <a:xfrm>
-            <a:off x="676656" y="2074951"/>
-            <a:ext cx="5769864" cy="3814521"/>
+            <a:off x="2253530" y="2048256"/>
+            <a:ext cx="2616115" cy="3867911"/>
           </a:xfrm>
           <a:prstGeom prst="rect">
             <a:avLst/>
@@ -23295,8 +23295,8 @@
         </p:nvSpPr>
         <p:spPr>
           <a:xfrm>
-            <a:off x="566928" y="1920240"/>
-            <a:ext cx="5989320" cy="4123944"/>
+            <a:off x="566928" y="2001478"/>
+            <a:ext cx="5989320" cy="3961468"/>
           </a:xfrm>
           <a:prstGeom prst="roundRect">
             <a:avLst>
@@ -23335,7 +23335,7 @@
       </p:sp>
       <p:pic>
         <p:nvPicPr>
-          <p:cNvPr id="9" name="Picture 8" descr="13_big_toe_press-static_webp.jpg"/>
+          <p:cNvPr id="9" name="Picture 8" descr="13_big_toe_press_down_jpg.jpg"/>
           <p:cNvPicPr>
             <a:picLocks noChangeAspect="1"/>
           </p:cNvPicPr>
@@ -23349,8 +23349,8 @@
         </p:blipFill>
         <p:spPr>
           <a:xfrm>
-            <a:off x="676656" y="2074951"/>
-            <a:ext cx="5769864" cy="3814521"/>
+            <a:off x="694945" y="2129494"/>
+            <a:ext cx="5733286" cy="3705436"/>
           </a:xfrm>
           <a:prstGeom prst="rect">
             <a:avLst/>
@@ -23916,8 +23916,8 @@
         </p:nvSpPr>
         <p:spPr>
           <a:xfrm>
-            <a:off x="566928" y="1920240"/>
-            <a:ext cx="5989320" cy="4123944"/>
+            <a:off x="1846939" y="1920240"/>
+            <a:ext cx="3429298" cy="4123944"/>
           </a:xfrm>
           <a:prstGeom prst="roundRect">
             <a:avLst>
@@ -23956,7 +23956,7 @@
       </p:sp>
       <p:pic>
         <p:nvPicPr>
-          <p:cNvPr id="9" name="Picture 8" descr="14_abduction_isometric-static_webp.jpg"/>
+          <p:cNvPr id="9" name="Picture 8" descr="14_abduction_isometric_jpg.jpg"/>
           <p:cNvPicPr>
             <a:picLocks noChangeAspect="1"/>
           </p:cNvPicPr>
@@ -23970,8 +23970,8 @@
         </p:blipFill>
         <p:spPr>
           <a:xfrm>
-            <a:off x="676656" y="2074951"/>
-            <a:ext cx="5769864" cy="3814521"/>
+            <a:off x="1974955" y="2048256"/>
+            <a:ext cx="3173266" cy="3867911"/>
           </a:xfrm>
           <a:prstGeom prst="rect">
             <a:avLst/>
@@ -24537,8 +24537,8 @@
         </p:nvSpPr>
         <p:spPr>
           <a:xfrm>
-            <a:off x="566928" y="1920240"/>
-            <a:ext cx="5989320" cy="4123944"/>
+            <a:off x="2150527" y="1920240"/>
+            <a:ext cx="2822122" cy="4123944"/>
           </a:xfrm>
           <a:prstGeom prst="roundRect">
             <a:avLst>
@@ -24577,7 +24577,7 @@
       </p:sp>
       <p:pic>
         <p:nvPicPr>
-          <p:cNvPr id="9" name="Picture 8" descr="15_spread_squeeze-static_webp.jpg"/>
+          <p:cNvPr id="9" name="Picture 8" descr="15_spread_squeeze_jpg.jpg"/>
           <p:cNvPicPr>
             <a:picLocks noChangeAspect="1"/>
           </p:cNvPicPr>
@@ -24591,8 +24591,8 @@
         </p:blipFill>
         <p:spPr>
           <a:xfrm>
-            <a:off x="676656" y="2074951"/>
-            <a:ext cx="5769864" cy="3814521"/>
+            <a:off x="2278543" y="2048256"/>
+            <a:ext cx="2566090" cy="3867911"/>
           </a:xfrm>
           <a:prstGeom prst="rect">
             <a:avLst/>
@@ -25625,8 +25625,8 @@
         </p:nvSpPr>
         <p:spPr>
           <a:xfrm>
-            <a:off x="566928" y="1920240"/>
-            <a:ext cx="5989320" cy="4123944"/>
+            <a:off x="2449282" y="1920240"/>
+            <a:ext cx="2224611" cy="4123944"/>
           </a:xfrm>
           <a:prstGeom prst="roundRect">
             <a:avLst>
@@ -25665,7 +25665,7 @@
       </p:sp>
       <p:pic>
         <p:nvPicPr>
-          <p:cNvPr id="9" name="Picture 8" descr="16_forward_lean-static_webp.jpg"/>
+          <p:cNvPr id="9" name="Picture 8" descr="16_forward_lean_jpg.jpg"/>
           <p:cNvPicPr>
             <a:picLocks noChangeAspect="1"/>
           </p:cNvPicPr>
@@ -25679,8 +25679,8 @@
         </p:blipFill>
         <p:spPr>
           <a:xfrm>
-            <a:off x="676656" y="2074951"/>
-            <a:ext cx="5769864" cy="3814521"/>
+            <a:off x="2577298" y="2048256"/>
+            <a:ext cx="1968579" cy="3867911"/>
           </a:xfrm>
           <a:prstGeom prst="rect">
             <a:avLst/>
@@ -26246,8 +26246,8 @@
         </p:nvSpPr>
         <p:spPr>
           <a:xfrm>
-            <a:off x="566928" y="1920240"/>
-            <a:ext cx="5989320" cy="4123944"/>
+            <a:off x="2036826" y="1920240"/>
+            <a:ext cx="3049524" cy="4123944"/>
           </a:xfrm>
           <a:prstGeom prst="roundRect">
             <a:avLst>
@@ -26286,7 +26286,7 @@
       </p:sp>
       <p:pic>
         <p:nvPicPr>
-          <p:cNvPr id="9" name="Picture 8" descr="17_heel_raise-static_webp.jpg"/>
+          <p:cNvPr id="9" name="Picture 8" descr="17_heel_raise_jpg.jpg"/>
           <p:cNvPicPr>
             <a:picLocks noChangeAspect="1"/>
           </p:cNvPicPr>
@@ -26300,8 +26300,8 @@
         </p:blipFill>
         <p:spPr>
           <a:xfrm>
-            <a:off x="676656" y="2074951"/>
-            <a:ext cx="5769864" cy="3814521"/>
+            <a:off x="2164842" y="2048256"/>
+            <a:ext cx="2793492" cy="3867912"/>
           </a:xfrm>
           <a:prstGeom prst="rect">
             <a:avLst/>
@@ -26867,8 +26867,8 @@
         </p:nvSpPr>
         <p:spPr>
           <a:xfrm>
-            <a:off x="566928" y="1920240"/>
-            <a:ext cx="5989320" cy="4123944"/>
+            <a:off x="2044580" y="1920240"/>
+            <a:ext cx="3034016" cy="4123944"/>
           </a:xfrm>
           <a:prstGeom prst="roundRect">
             <a:avLst>
@@ -26907,7 +26907,7 @@
       </p:sp>
       <p:pic>
         <p:nvPicPr>
-          <p:cNvPr id="9" name="Picture 8" descr="18_push_off-static_webp.jpg"/>
+          <p:cNvPr id="9" name="Picture 8" descr="18_push_off_with_trailing_leg_jpg.jpg"/>
           <p:cNvPicPr>
             <a:picLocks noChangeAspect="1"/>
           </p:cNvPicPr>
@@ -26921,8 +26921,8 @@
         </p:blipFill>
         <p:spPr>
           <a:xfrm>
-            <a:off x="676656" y="2074951"/>
-            <a:ext cx="5769864" cy="3814521"/>
+            <a:off x="2172596" y="2048257"/>
+            <a:ext cx="2777984" cy="3867910"/>
           </a:xfrm>
           <a:prstGeom prst="rect">
             <a:avLst/>
@@ -29158,8 +29158,8 @@
         </p:nvSpPr>
         <p:spPr>
           <a:xfrm>
-            <a:off x="566928" y="1920240"/>
-            <a:ext cx="5989320" cy="4123944"/>
+            <a:off x="1704305" y="1920240"/>
+            <a:ext cx="3714566" cy="4123944"/>
           </a:xfrm>
           <a:prstGeom prst="roundRect">
             <a:avLst>
@@ -29198,7 +29198,7 @@
       </p:sp>
       <p:pic>
         <p:nvPicPr>
-          <p:cNvPr id="9" name="Picture 8" descr="19_lunges-static_webp.jpg"/>
+          <p:cNvPr id="9" name="Picture 8" descr="19_lunges_jpg.jpg"/>
           <p:cNvPicPr>
             <a:picLocks noChangeAspect="1"/>
           </p:cNvPicPr>
@@ -29212,8 +29212,8 @@
         </p:blipFill>
         <p:spPr>
           <a:xfrm>
-            <a:off x="676656" y="2074951"/>
-            <a:ext cx="5769864" cy="3814521"/>
+            <a:off x="1832321" y="2048256"/>
+            <a:ext cx="3458534" cy="3867911"/>
           </a:xfrm>
           <a:prstGeom prst="rect">
             <a:avLst/>
@@ -29779,8 +29779,8 @@
         </p:nvSpPr>
         <p:spPr>
           <a:xfrm>
-            <a:off x="566928" y="1920240"/>
-            <a:ext cx="5989320" cy="4123944"/>
+            <a:off x="566928" y="2258431"/>
+            <a:ext cx="5989320" cy="3447562"/>
           </a:xfrm>
           <a:prstGeom prst="roundRect">
             <a:avLst>
@@ -29819,7 +29819,7 @@
       </p:sp>
       <p:pic>
         <p:nvPicPr>
-          <p:cNvPr id="9" name="Picture 8" descr="20_mountain_climbers-static_webp.jpg"/>
+          <p:cNvPr id="9" name="Picture 8" descr="20_mountain_climbers_jpg.jpg"/>
           <p:cNvPicPr>
             <a:picLocks noChangeAspect="1"/>
           </p:cNvPicPr>
@@ -29833,8 +29833,8 @@
         </p:blipFill>
         <p:spPr>
           <a:xfrm>
-            <a:off x="676656" y="2074951"/>
-            <a:ext cx="5769864" cy="3814521"/>
+            <a:off x="694944" y="2386447"/>
+            <a:ext cx="5733287" cy="3191530"/>
           </a:xfrm>
           <a:prstGeom prst="rect">
             <a:avLst/>
@@ -30400,8 +30400,8 @@
         </p:nvSpPr>
         <p:spPr>
           <a:xfrm>
-            <a:off x="566928" y="1920240"/>
-            <a:ext cx="5989320" cy="4123944"/>
+            <a:off x="1761147" y="1920240"/>
+            <a:ext cx="3600881" cy="4123944"/>
           </a:xfrm>
           <a:prstGeom prst="roundRect">
             <a:avLst>
@@ -30440,7 +30440,7 @@
       </p:sp>
       <p:pic>
         <p:nvPicPr>
-          <p:cNvPr id="9" name="Picture 8" descr="21_hopping-static_webp.jpg"/>
+          <p:cNvPr id="9" name="Picture 8" descr="21_hopping_jpg.jpg"/>
           <p:cNvPicPr>
             <a:picLocks noChangeAspect="1"/>
           </p:cNvPicPr>
@@ -30454,8 +30454,8 @@
         </p:blipFill>
         <p:spPr>
           <a:xfrm>
-            <a:off x="676656" y="2074951"/>
-            <a:ext cx="5769864" cy="3814521"/>
+            <a:off x="1889163" y="2048256"/>
+            <a:ext cx="3344849" cy="3867911"/>
           </a:xfrm>
           <a:prstGeom prst="rect">
             <a:avLst/>
@@ -31021,8 +31021,8 @@
         </p:nvSpPr>
         <p:spPr>
           <a:xfrm>
-            <a:off x="566928" y="1920240"/>
-            <a:ext cx="5989320" cy="4123944"/>
+            <a:off x="1798242" y="1920240"/>
+            <a:ext cx="3526692" cy="4123944"/>
           </a:xfrm>
           <a:prstGeom prst="roundRect">
             <a:avLst>
@@ -31061,7 +31061,7 @@
       </p:sp>
       <p:pic>
         <p:nvPicPr>
-          <p:cNvPr id="9" name="Picture 8" descr="22_side_toe_taps-static_webp.jpg"/>
+          <p:cNvPr id="9" name="Picture 8" descr="22_side_toe_taps_jpg.jpg"/>
           <p:cNvPicPr>
             <a:picLocks noChangeAspect="1"/>
           </p:cNvPicPr>
@@ -31075,8 +31075,8 @@
         </p:blipFill>
         <p:spPr>
           <a:xfrm>
-            <a:off x="676656" y="2074951"/>
-            <a:ext cx="5769864" cy="3814521"/>
+            <a:off x="1926258" y="2048257"/>
+            <a:ext cx="3270660" cy="3867910"/>
           </a:xfrm>
           <a:prstGeom prst="rect">
             <a:avLst/>
@@ -31642,8 +31642,8 @@
         </p:nvSpPr>
         <p:spPr>
           <a:xfrm>
-            <a:off x="566928" y="1920240"/>
-            <a:ext cx="5989320" cy="4123944"/>
+            <a:off x="1984813" y="1920240"/>
+            <a:ext cx="3153549" cy="4123944"/>
           </a:xfrm>
           <a:prstGeom prst="roundRect">
             <a:avLst>
@@ -31682,7 +31682,7 @@
       </p:sp>
       <p:pic>
         <p:nvPicPr>
-          <p:cNvPr id="9" name="Picture 8" descr="23_side_hops-static_webp.jpg"/>
+          <p:cNvPr id="9" name="Picture 8" descr="23_side_hops_jpg.jpg"/>
           <p:cNvPicPr>
             <a:picLocks noChangeAspect="1"/>
           </p:cNvPicPr>
@@ -31696,8 +31696,8 @@
         </p:blipFill>
         <p:spPr>
           <a:xfrm>
-            <a:off x="676656" y="2074951"/>
-            <a:ext cx="5769864" cy="3814521"/>
+            <a:off x="2112829" y="2048256"/>
+            <a:ext cx="2897517" cy="3867911"/>
           </a:xfrm>
           <a:prstGeom prst="rect">
             <a:avLst/>
